--- a/docs/project/poster.pptx
+++ b/docs/project/poster.pptx
@@ -9141,7 +9141,7 @@
                 <a:ea typeface="Microsoft YaHei"/>
                 <a:cs typeface="Microsoft YaHei"/>
               </a:rPr>
-              <a:t>Power System Model Audit Skill 1.1</a:t>
+              <a:t>Power System Model Audit · v1.1.2</a:t>
             </a:r>
           </a:p>
         </p:txBody>
@@ -9338,11 +9338,11 @@
                 <a:ea typeface="Microsoft YaHei"/>
                 <a:cs typeface="Microsoft YaHei"/>
               </a:rPr>
-              <a:t>自学习、模块化、轻量化</a:t>
+              <a:t>电力系统优化问题校核与修正Skill</a:t>
             </a:r>
             <a:r>
               <a:rPr lang="zh-CN" altLang="en-US" dirty="0"/>
-              <a:t>的</a:t>
+              <a:t/>
             </a:r>
             <a:r>
               <a:rPr sz="4650" b="1" dirty="0" err="1">
@@ -9353,7 +9353,7 @@
                 <a:ea typeface="Microsoft YaHei"/>
                 <a:cs typeface="Microsoft YaHei"/>
               </a:rPr>
-              <a:t>电力系统优化</a:t>
+              <a:t/>
             </a:r>
             <a:r>
               <a:rPr lang="zh-CN" altLang="en-US" sz="4650" b="1" dirty="0">
@@ -9364,11 +9364,11 @@
                 <a:ea typeface="Microsoft YaHei"/>
                 <a:cs typeface="Microsoft YaHei"/>
               </a:rPr>
-              <a:t>问题校核与修正</a:t>
+              <a:t/>
             </a:r>
             <a:r>
               <a:rPr lang="en-US" altLang="zh-CN" dirty="0"/>
-              <a:t>S</a:t>
+              <a:t/>
             </a:r>
             <a:r>
               <a:rPr sz="4650" b="1" dirty="0">
@@ -9379,7 +9379,7 @@
                 <a:ea typeface="Microsoft YaHei"/>
                 <a:cs typeface="Microsoft YaHei"/>
               </a:rPr>
-              <a:t>kill</a:t>
+              <a:t/>
             </a:r>
           </a:p>
         </p:txBody>

--- a/docs/project/poster.pptx
+++ b/docs/project/poster.pptx
@@ -9141,7 +9141,7 @@
                 <a:ea typeface="Microsoft YaHei"/>
                 <a:cs typeface="Microsoft YaHei"/>
               </a:rPr>
-              <a:t>Power System Model Audit · v1.1.2</a:t>
+              <a:t>Power System Model Audit Skill 1.1</a:t>
             </a:r>
           </a:p>
         </p:txBody>
@@ -9338,11 +9338,11 @@
                 <a:ea typeface="Microsoft YaHei"/>
                 <a:cs typeface="Microsoft YaHei"/>
               </a:rPr>
-              <a:t>电力系统优化问题校核与修正Skill</a:t>
+              <a:t>自学习、模块化、轻量化</a:t>
             </a:r>
             <a:r>
               <a:rPr lang="zh-CN" altLang="en-US" dirty="0"/>
-              <a:t/>
+              <a:t>的</a:t>
             </a:r>
             <a:r>
               <a:rPr sz="4650" b="1" dirty="0" err="1">
@@ -9353,7 +9353,7 @@
                 <a:ea typeface="Microsoft YaHei"/>
                 <a:cs typeface="Microsoft YaHei"/>
               </a:rPr>
-              <a:t/>
+              <a:t>电力系统优化</a:t>
             </a:r>
             <a:r>
               <a:rPr lang="zh-CN" altLang="en-US" sz="4650" b="1" dirty="0">
@@ -9364,11 +9364,11 @@
                 <a:ea typeface="Microsoft YaHei"/>
                 <a:cs typeface="Microsoft YaHei"/>
               </a:rPr>
-              <a:t/>
+              <a:t>问题校核与修正</a:t>
             </a:r>
             <a:r>
               <a:rPr lang="en-US" altLang="zh-CN" dirty="0"/>
-              <a:t/>
+              <a:t>S</a:t>
             </a:r>
             <a:r>
               <a:rPr sz="4650" b="1" dirty="0">
@@ -9379,7 +9379,7 @@
                 <a:ea typeface="Microsoft YaHei"/>
                 <a:cs typeface="Microsoft YaHei"/>
               </a:rPr>
-              <a:t/>
+              <a:t>kill</a:t>
             </a:r>
           </a:p>
         </p:txBody>
